--- a/Reporte 250826.pptx
+++ b/Reporte 250826.pptx
@@ -5,7 +5,7 @@
     <p:sldMasterId id="2147483672" r:id="rId1"/>
   </p:sldMasterIdLst>
   <p:notesMasterIdLst>
-    <p:notesMasterId r:id="rId18"/>
+    <p:notesMasterId r:id="rId20"/>
   </p:notesMasterIdLst>
   <p:sldIdLst>
     <p:sldId id="350" r:id="rId2"/>
@@ -17,28 +17,30 @@
     <p:sldId id="395" r:id="rId8"/>
     <p:sldId id="396" r:id="rId9"/>
     <p:sldId id="403" r:id="rId10"/>
-    <p:sldId id="388" r:id="rId11"/>
-    <p:sldId id="351" r:id="rId12"/>
-    <p:sldId id="361" r:id="rId13"/>
-    <p:sldId id="412" r:id="rId14"/>
-    <p:sldId id="371" r:id="rId15"/>
-    <p:sldId id="413" r:id="rId16"/>
-    <p:sldId id="280" r:id="rId17"/>
+    <p:sldId id="414" r:id="rId11"/>
+    <p:sldId id="415" r:id="rId12"/>
+    <p:sldId id="388" r:id="rId13"/>
+    <p:sldId id="351" r:id="rId14"/>
+    <p:sldId id="361" r:id="rId15"/>
+    <p:sldId id="412" r:id="rId16"/>
+    <p:sldId id="371" r:id="rId17"/>
+    <p:sldId id="413" r:id="rId18"/>
+    <p:sldId id="280" r:id="rId19"/>
   </p:sldIdLst>
   <p:sldSz cx="9144000" cy="5143500" type="screen16x9"/>
   <p:notesSz cx="6858000" cy="9144000"/>
   <p:embeddedFontLst>
     <p:embeddedFont>
       <p:font typeface="Montserrat" panose="00000500000000000000" pitchFamily="2" charset="0"/>
-      <p:regular r:id="rId19"/>
-      <p:bold r:id="rId20"/>
-      <p:italic r:id="rId21"/>
-      <p:boldItalic r:id="rId22"/>
+      <p:regular r:id="rId21"/>
+      <p:bold r:id="rId22"/>
+      <p:italic r:id="rId23"/>
+      <p:boldItalic r:id="rId24"/>
     </p:embeddedFont>
     <p:embeddedFont>
       <p:font typeface="Montserrat Black" panose="00000A00000000000000" pitchFamily="2" charset="0"/>
-      <p:bold r:id="rId23"/>
-      <p:boldItalic r:id="rId24"/>
+      <p:bold r:id="rId25"/>
+      <p:boldItalic r:id="rId26"/>
     </p:embeddedFont>
   </p:embeddedFontLst>
   <p:defaultTextStyle>
@@ -1162,6 +1164,174 @@
 </file>
 
 <file path=ppt/notesSlides/notesSlide6.xml><?xml version="1.0" encoding="utf-8"?>
+<p:notes xmlns:a="http://schemas.openxmlformats.org/drawingml/2006/main" xmlns:r="http://schemas.openxmlformats.org/officeDocument/2006/relationships" xmlns:p="http://schemas.openxmlformats.org/presentationml/2006/main">
+  <p:cSld>
+    <p:spTree>
+      <p:nvGrpSpPr>
+        <p:cNvPr id="1" name="">
+          <a:extLst>
+            <a:ext uri="{FF2B5EF4-FFF2-40B4-BE49-F238E27FC236}">
+              <a16:creationId xmlns:a16="http://schemas.microsoft.com/office/drawing/2014/main" id="{63BA1851-A1A4-56AE-F4F7-17B304D186EA}"/>
+            </a:ext>
+          </a:extLst>
+        </p:cNvPr>
+        <p:cNvGrpSpPr/>
+        <p:nvPr/>
+      </p:nvGrpSpPr>
+      <p:grpSpPr>
+        <a:xfrm>
+          <a:off x="0" y="0"/>
+          <a:ext cx="0" cy="0"/>
+          <a:chOff x="0" y="0"/>
+          <a:chExt cx="0" cy="0"/>
+        </a:xfrm>
+      </p:grpSpPr>
+      <p:sp>
+        <p:nvSpPr>
+          <p:cNvPr id="2" name="Marcador de imagen de diapositiva 1">
+            <a:extLst>
+              <a:ext uri="{FF2B5EF4-FFF2-40B4-BE49-F238E27FC236}">
+                <a16:creationId xmlns:a16="http://schemas.microsoft.com/office/drawing/2014/main" id="{DC8D9DD3-F259-E3A4-8482-0FB8A5FA9D0A}"/>
+              </a:ext>
+            </a:extLst>
+          </p:cNvPr>
+          <p:cNvSpPr>
+            <a:spLocks noGrp="1" noRot="1" noChangeAspect="1"/>
+          </p:cNvSpPr>
+          <p:nvPr>
+            <p:ph type="sldImg"/>
+          </p:nvPr>
+        </p:nvSpPr>
+        <p:spPr>
+          <a:xfrm>
+            <a:off x="381000" y="685800"/>
+            <a:ext cx="6096000" cy="3429000"/>
+          </a:xfrm>
+        </p:spPr>
+      </p:sp>
+      <p:sp>
+        <p:nvSpPr>
+          <p:cNvPr id="3" name="Marcador de notas 2">
+            <a:extLst>
+              <a:ext uri="{FF2B5EF4-FFF2-40B4-BE49-F238E27FC236}">
+                <a16:creationId xmlns:a16="http://schemas.microsoft.com/office/drawing/2014/main" id="{35738C47-DC60-1FA5-FA8D-E7C67734A857}"/>
+              </a:ext>
+            </a:extLst>
+          </p:cNvPr>
+          <p:cNvSpPr>
+            <a:spLocks noGrp="1"/>
+          </p:cNvSpPr>
+          <p:nvPr>
+            <p:ph type="body" idx="1"/>
+          </p:nvPr>
+        </p:nvSpPr>
+        <p:spPr/>
+        <p:txBody>
+          <a:bodyPr/>
+          <a:lstStyle/>
+          <a:p>
+            <a:endParaRPr lang="es-MX" dirty="0"/>
+          </a:p>
+        </p:txBody>
+      </p:sp>
+    </p:spTree>
+    <p:extLst>
+      <p:ext uri="{BB962C8B-B14F-4D97-AF65-F5344CB8AC3E}">
+        <p14:creationId xmlns:p14="http://schemas.microsoft.com/office/powerpoint/2010/main" val="1278072674"/>
+      </p:ext>
+    </p:extLst>
+  </p:cSld>
+  <p:clrMapOvr>
+    <a:masterClrMapping/>
+  </p:clrMapOvr>
+</p:notes>
+</file>
+
+<file path=ppt/notesSlides/notesSlide7.xml><?xml version="1.0" encoding="utf-8"?>
+<p:notes xmlns:a="http://schemas.openxmlformats.org/drawingml/2006/main" xmlns:r="http://schemas.openxmlformats.org/officeDocument/2006/relationships" xmlns:p="http://schemas.openxmlformats.org/presentationml/2006/main">
+  <p:cSld>
+    <p:spTree>
+      <p:nvGrpSpPr>
+        <p:cNvPr id="1" name="">
+          <a:extLst>
+            <a:ext uri="{FF2B5EF4-FFF2-40B4-BE49-F238E27FC236}">
+              <a16:creationId xmlns:a16="http://schemas.microsoft.com/office/drawing/2014/main" id="{88B58DE4-3412-9088-B1B4-79869F944018}"/>
+            </a:ext>
+          </a:extLst>
+        </p:cNvPr>
+        <p:cNvGrpSpPr/>
+        <p:nvPr/>
+      </p:nvGrpSpPr>
+      <p:grpSpPr>
+        <a:xfrm>
+          <a:off x="0" y="0"/>
+          <a:ext cx="0" cy="0"/>
+          <a:chOff x="0" y="0"/>
+          <a:chExt cx="0" cy="0"/>
+        </a:xfrm>
+      </p:grpSpPr>
+      <p:sp>
+        <p:nvSpPr>
+          <p:cNvPr id="2" name="Marcador de imagen de diapositiva 1">
+            <a:extLst>
+              <a:ext uri="{FF2B5EF4-FFF2-40B4-BE49-F238E27FC236}">
+                <a16:creationId xmlns:a16="http://schemas.microsoft.com/office/drawing/2014/main" id="{AC008E0C-A5B4-91BC-3FDB-E307F83D1C88}"/>
+              </a:ext>
+            </a:extLst>
+          </p:cNvPr>
+          <p:cNvSpPr>
+            <a:spLocks noGrp="1" noRot="1" noChangeAspect="1"/>
+          </p:cNvSpPr>
+          <p:nvPr>
+            <p:ph type="sldImg"/>
+          </p:nvPr>
+        </p:nvSpPr>
+        <p:spPr>
+          <a:xfrm>
+            <a:off x="381000" y="685800"/>
+            <a:ext cx="6096000" cy="3429000"/>
+          </a:xfrm>
+        </p:spPr>
+      </p:sp>
+      <p:sp>
+        <p:nvSpPr>
+          <p:cNvPr id="3" name="Marcador de notas 2">
+            <a:extLst>
+              <a:ext uri="{FF2B5EF4-FFF2-40B4-BE49-F238E27FC236}">
+                <a16:creationId xmlns:a16="http://schemas.microsoft.com/office/drawing/2014/main" id="{F57A4750-F976-FE9C-D318-EA85711B3403}"/>
+              </a:ext>
+            </a:extLst>
+          </p:cNvPr>
+          <p:cNvSpPr>
+            <a:spLocks noGrp="1"/>
+          </p:cNvSpPr>
+          <p:nvPr>
+            <p:ph type="body" idx="1"/>
+          </p:nvPr>
+        </p:nvSpPr>
+        <p:spPr/>
+        <p:txBody>
+          <a:bodyPr/>
+          <a:lstStyle/>
+          <a:p>
+            <a:endParaRPr lang="es-MX" dirty="0"/>
+          </a:p>
+        </p:txBody>
+      </p:sp>
+    </p:spTree>
+    <p:extLst>
+      <p:ext uri="{BB962C8B-B14F-4D97-AF65-F5344CB8AC3E}">
+        <p14:creationId xmlns:p14="http://schemas.microsoft.com/office/powerpoint/2010/main" val="1725484864"/>
+      </p:ext>
+    </p:extLst>
+  </p:cSld>
+  <p:clrMapOvr>
+    <a:masterClrMapping/>
+  </p:clrMapOvr>
+</p:notes>
+</file>
+
+<file path=ppt/notesSlides/notesSlide8.xml><?xml version="1.0" encoding="utf-8"?>
 <p:notes xmlns:a="http://schemas.openxmlformats.org/drawingml/2006/main" xmlns:r="http://schemas.openxmlformats.org/officeDocument/2006/relationships" xmlns:p="http://schemas.openxmlformats.org/presentationml/2006/main" showMasterSp="0" showMasterPhAnim="0">
   <p:cSld>
     <p:spTree>
@@ -6419,7 +6589,7 @@
                 <a:latin typeface="Montserrat Black"/>
                 <a:sym typeface="Arial"/>
               </a:rPr>
-              <a:t>Elaborado: 24</a:t>
+              <a:t>Elaborado: 25</a:t>
             </a:r>
             <a:r>
               <a:rPr lang="es-MX" sz="1600" dirty="0">
@@ -6483,6 +6653,242 @@
 </file>
 
 <file path=ppt/slides/slide10.xml><?xml version="1.0" encoding="utf-8"?>
+<p:sld xmlns:a="http://schemas.openxmlformats.org/drawingml/2006/main" xmlns:r="http://schemas.openxmlformats.org/officeDocument/2006/relationships" xmlns:p="http://schemas.openxmlformats.org/presentationml/2006/main">
+  <p:cSld>
+    <p:bg>
+      <p:bgPr>
+        <a:solidFill>
+          <a:srgbClr val="FAFAFA"/>
+        </a:solidFill>
+        <a:effectLst/>
+      </p:bgPr>
+    </p:bg>
+    <p:spTree>
+      <p:nvGrpSpPr>
+        <p:cNvPr id="1" name="">
+          <a:extLst>
+            <a:ext uri="{FF2B5EF4-FFF2-40B4-BE49-F238E27FC236}">
+              <a16:creationId xmlns:a16="http://schemas.microsoft.com/office/drawing/2014/main" id="{6060E934-0A8C-9C3C-BF5A-BE8DDF12B924}"/>
+            </a:ext>
+          </a:extLst>
+        </p:cNvPr>
+        <p:cNvGrpSpPr/>
+        <p:nvPr/>
+      </p:nvGrpSpPr>
+      <p:grpSpPr>
+        <a:xfrm>
+          <a:off x="0" y="0"/>
+          <a:ext cx="0" cy="0"/>
+          <a:chOff x="0" y="0"/>
+          <a:chExt cx="0" cy="0"/>
+        </a:xfrm>
+      </p:grpSpPr>
+      <p:sp>
+        <p:nvSpPr>
+          <p:cNvPr id="7" name="CuadroTexto 6">
+            <a:extLst>
+              <a:ext uri="{FF2B5EF4-FFF2-40B4-BE49-F238E27FC236}">
+                <a16:creationId xmlns:a16="http://schemas.microsoft.com/office/drawing/2014/main" id="{F6149240-C34C-D946-C0AE-4D5D2E340038}"/>
+              </a:ext>
+            </a:extLst>
+          </p:cNvPr>
+          <p:cNvSpPr txBox="1"/>
+          <p:nvPr/>
+        </p:nvSpPr>
+        <p:spPr>
+          <a:xfrm>
+            <a:off x="908175" y="152426"/>
+            <a:ext cx="7254625" cy="369332"/>
+          </a:xfrm>
+          <a:prstGeom prst="rect">
+            <a:avLst/>
+          </a:prstGeom>
+          <a:noFill/>
+        </p:spPr>
+        <p:txBody>
+          <a:bodyPr wrap="square">
+            <a:spAutoFit/>
+          </a:bodyPr>
+          <a:lstStyle/>
+          <a:p>
+            <a:pPr algn="ctr">
+              <a:buNone/>
+            </a:pPr>
+            <a:r>
+              <a:rPr lang="es-MX" sz="1800" b="1" i="0" dirty="0">
+                <a:solidFill>
+                  <a:srgbClr val="000000"/>
+                </a:solidFill>
+                <a:effectLst/>
+                <a:latin typeface="Montserrat" pitchFamily="2" charset="0"/>
+              </a:rPr>
+              <a:t>Detalle de Notas en primeras planas</a:t>
+            </a:r>
+          </a:p>
+        </p:txBody>
+      </p:sp>
+      <p:pic>
+        <p:nvPicPr>
+          <p:cNvPr id="3" name="Imagen 2">
+            <a:extLst>
+              <a:ext uri="{FF2B5EF4-FFF2-40B4-BE49-F238E27FC236}">
+                <a16:creationId xmlns:a16="http://schemas.microsoft.com/office/drawing/2014/main" id="{5FC9ACF0-0FB6-D3F3-8BD0-643AE3B9702E}"/>
+              </a:ext>
+            </a:extLst>
+          </p:cNvPr>
+          <p:cNvPicPr>
+            <a:picLocks noChangeAspect="1"/>
+          </p:cNvPicPr>
+          <p:nvPr/>
+        </p:nvPicPr>
+        <p:blipFill>
+          <a:blip r:embed="rId3"/>
+          <a:stretch>
+            <a:fillRect/>
+          </a:stretch>
+        </p:blipFill>
+        <p:spPr>
+          <a:xfrm>
+            <a:off x="644453" y="521758"/>
+            <a:ext cx="7855093" cy="3006734"/>
+          </a:xfrm>
+          <a:prstGeom prst="rect">
+            <a:avLst/>
+          </a:prstGeom>
+        </p:spPr>
+      </p:pic>
+    </p:spTree>
+    <p:extLst>
+      <p:ext uri="{BB962C8B-B14F-4D97-AF65-F5344CB8AC3E}">
+        <p14:creationId xmlns:p14="http://schemas.microsoft.com/office/powerpoint/2010/main" val="2389119801"/>
+      </p:ext>
+    </p:extLst>
+  </p:cSld>
+  <p:clrMapOvr>
+    <a:masterClrMapping/>
+  </p:clrMapOvr>
+</p:sld>
+</file>
+
+<file path=ppt/slides/slide11.xml><?xml version="1.0" encoding="utf-8"?>
+<p:sld xmlns:a="http://schemas.openxmlformats.org/drawingml/2006/main" xmlns:r="http://schemas.openxmlformats.org/officeDocument/2006/relationships" xmlns:p="http://schemas.openxmlformats.org/presentationml/2006/main">
+  <p:cSld>
+    <p:bg>
+      <p:bgPr>
+        <a:solidFill>
+          <a:srgbClr val="FAFAFA"/>
+        </a:solidFill>
+        <a:effectLst/>
+      </p:bgPr>
+    </p:bg>
+    <p:spTree>
+      <p:nvGrpSpPr>
+        <p:cNvPr id="1" name="">
+          <a:extLst>
+            <a:ext uri="{FF2B5EF4-FFF2-40B4-BE49-F238E27FC236}">
+              <a16:creationId xmlns:a16="http://schemas.microsoft.com/office/drawing/2014/main" id="{4FBF25A5-4702-3E49-A0CB-7D32C4F11E74}"/>
+            </a:ext>
+          </a:extLst>
+        </p:cNvPr>
+        <p:cNvGrpSpPr/>
+        <p:nvPr/>
+      </p:nvGrpSpPr>
+      <p:grpSpPr>
+        <a:xfrm>
+          <a:off x="0" y="0"/>
+          <a:ext cx="0" cy="0"/>
+          <a:chOff x="0" y="0"/>
+          <a:chExt cx="0" cy="0"/>
+        </a:xfrm>
+      </p:grpSpPr>
+      <p:sp>
+        <p:nvSpPr>
+          <p:cNvPr id="7" name="CuadroTexto 6">
+            <a:extLst>
+              <a:ext uri="{FF2B5EF4-FFF2-40B4-BE49-F238E27FC236}">
+                <a16:creationId xmlns:a16="http://schemas.microsoft.com/office/drawing/2014/main" id="{1D9F8713-584F-5DB2-99A4-71CC77D22989}"/>
+              </a:ext>
+            </a:extLst>
+          </p:cNvPr>
+          <p:cNvSpPr txBox="1"/>
+          <p:nvPr/>
+        </p:nvSpPr>
+        <p:spPr>
+          <a:xfrm>
+            <a:off x="908175" y="152426"/>
+            <a:ext cx="7254625" cy="369332"/>
+          </a:xfrm>
+          <a:prstGeom prst="rect">
+            <a:avLst/>
+          </a:prstGeom>
+          <a:noFill/>
+        </p:spPr>
+        <p:txBody>
+          <a:bodyPr wrap="square">
+            <a:spAutoFit/>
+          </a:bodyPr>
+          <a:lstStyle/>
+          <a:p>
+            <a:pPr algn="ctr">
+              <a:buNone/>
+            </a:pPr>
+            <a:r>
+              <a:rPr lang="es-MX" sz="1800" b="1" i="0" dirty="0">
+                <a:solidFill>
+                  <a:srgbClr val="000000"/>
+                </a:solidFill>
+                <a:effectLst/>
+                <a:latin typeface="Montserrat" pitchFamily="2" charset="0"/>
+              </a:rPr>
+              <a:t>Detalle de Notas en primeras planas</a:t>
+            </a:r>
+          </a:p>
+        </p:txBody>
+      </p:sp>
+      <p:pic>
+        <p:nvPicPr>
+          <p:cNvPr id="4" name="Imagen 3">
+            <a:extLst>
+              <a:ext uri="{FF2B5EF4-FFF2-40B4-BE49-F238E27FC236}">
+                <a16:creationId xmlns:a16="http://schemas.microsoft.com/office/drawing/2014/main" id="{FD905C5C-C06D-DF56-AB71-D818E6AEB47F}"/>
+              </a:ext>
+            </a:extLst>
+          </p:cNvPr>
+          <p:cNvPicPr>
+            <a:picLocks noChangeAspect="1"/>
+          </p:cNvPicPr>
+          <p:nvPr/>
+        </p:nvPicPr>
+        <p:blipFill>
+          <a:blip r:embed="rId3"/>
+          <a:stretch>
+            <a:fillRect/>
+          </a:stretch>
+        </p:blipFill>
+        <p:spPr>
+          <a:xfrm>
+            <a:off x="604284" y="1312832"/>
+            <a:ext cx="7935432" cy="2762636"/>
+          </a:xfrm>
+          <a:prstGeom prst="rect">
+            <a:avLst/>
+          </a:prstGeom>
+        </p:spPr>
+      </p:pic>
+    </p:spTree>
+    <p:extLst>
+      <p:ext uri="{BB962C8B-B14F-4D97-AF65-F5344CB8AC3E}">
+        <p14:creationId xmlns:p14="http://schemas.microsoft.com/office/powerpoint/2010/main" val="911901326"/>
+      </p:ext>
+    </p:extLst>
+  </p:cSld>
+  <p:clrMapOvr>
+    <a:masterClrMapping/>
+  </p:clrMapOvr>
+</p:sld>
+</file>
+
+<file path=ppt/slides/slide12.xml><?xml version="1.0" encoding="utf-8"?>
 <p:sld xmlns:a="http://schemas.openxmlformats.org/drawingml/2006/main" xmlns:r="http://schemas.openxmlformats.org/officeDocument/2006/relationships" xmlns:p="http://schemas.openxmlformats.org/presentationml/2006/main">
   <p:cSld>
     <p:bg>
@@ -6594,7 +7000,7 @@
 </p:sld>
 </file>
 
-<file path=ppt/slides/slide11.xml><?xml version="1.0" encoding="utf-8"?>
+<file path=ppt/slides/slide13.xml><?xml version="1.0" encoding="utf-8"?>
 <p:sld xmlns:a="http://schemas.openxmlformats.org/drawingml/2006/main" xmlns:r="http://schemas.openxmlformats.org/officeDocument/2006/relationships" xmlns:p="http://schemas.openxmlformats.org/presentationml/2006/main">
   <p:cSld>
     <p:bg>
@@ -6700,7 +7106,7 @@
 </p:sld>
 </file>
 
-<file path=ppt/slides/slide12.xml><?xml version="1.0" encoding="utf-8"?>
+<file path=ppt/slides/slide14.xml><?xml version="1.0" encoding="utf-8"?>
 <p:sld xmlns:a="http://schemas.openxmlformats.org/drawingml/2006/main" xmlns:r="http://schemas.openxmlformats.org/officeDocument/2006/relationships" xmlns:p="http://schemas.openxmlformats.org/presentationml/2006/main">
   <p:cSld>
     <p:bg>
@@ -6806,7 +7212,7 @@
 </p:sld>
 </file>
 
-<file path=ppt/slides/slide13.xml><?xml version="1.0" encoding="utf-8"?>
+<file path=ppt/slides/slide15.xml><?xml version="1.0" encoding="utf-8"?>
 <p:sld xmlns:a="http://schemas.openxmlformats.org/drawingml/2006/main" xmlns:r="http://schemas.openxmlformats.org/officeDocument/2006/relationships" xmlns:p="http://schemas.openxmlformats.org/presentationml/2006/main">
   <p:cSld>
     <p:bg>
@@ -6912,7 +7318,7 @@
 </p:sld>
 </file>
 
-<file path=ppt/slides/slide14.xml><?xml version="1.0" encoding="utf-8"?>
+<file path=ppt/slides/slide16.xml><?xml version="1.0" encoding="utf-8"?>
 <p:sld xmlns:a="http://schemas.openxmlformats.org/drawingml/2006/main" xmlns:r="http://schemas.openxmlformats.org/officeDocument/2006/relationships" xmlns:p="http://schemas.openxmlformats.org/presentationml/2006/main">
   <p:cSld>
     <p:bg>
@@ -7018,7 +7424,7 @@
 </p:sld>
 </file>
 
-<file path=ppt/slides/slide15.xml><?xml version="1.0" encoding="utf-8"?>
+<file path=ppt/slides/slide17.xml><?xml version="1.0" encoding="utf-8"?>
 <p:sld xmlns:a="http://schemas.openxmlformats.org/drawingml/2006/main" xmlns:r="http://schemas.openxmlformats.org/officeDocument/2006/relationships" xmlns:p="http://schemas.openxmlformats.org/presentationml/2006/main">
   <p:cSld>
     <p:bg>
@@ -7130,7 +7536,7 @@
 </p:sld>
 </file>
 
-<file path=ppt/slides/slide16.xml><?xml version="1.0" encoding="utf-8"?>
+<file path=ppt/slides/slide18.xml><?xml version="1.0" encoding="utf-8"?>
 <p:sld xmlns:a="http://schemas.openxmlformats.org/drawingml/2006/main" xmlns:r="http://schemas.openxmlformats.org/officeDocument/2006/relationships" xmlns:p="http://schemas.openxmlformats.org/presentationml/2006/main">
   <p:cSld>
     <p:spTree>
@@ -7263,10 +7669,10 @@
       </p:sp>
       <p:pic>
         <p:nvPicPr>
-          <p:cNvPr id="3" name="Imagen 2">
+          <p:cNvPr id="6" name="Imagen 5">
             <a:extLst>
               <a:ext uri="{FF2B5EF4-FFF2-40B4-BE49-F238E27FC236}">
-                <a16:creationId xmlns:a16="http://schemas.microsoft.com/office/drawing/2014/main" id="{19140D58-A794-3D75-BC8E-8AA2B915FBAF}"/>
+                <a16:creationId xmlns:a16="http://schemas.microsoft.com/office/drawing/2014/main" id="{5D3E6BF1-2B6D-094B-26E2-5E3E94507C65}"/>
               </a:ext>
             </a:extLst>
           </p:cNvPr>
@@ -7283,8 +7689,8 @@
         </p:blipFill>
         <p:spPr>
           <a:xfrm>
-            <a:off x="0" y="967612"/>
-            <a:ext cx="9144000" cy="3351152"/>
+            <a:off x="0" y="937955"/>
+            <a:ext cx="9144000" cy="3410465"/>
           </a:xfrm>
           <a:prstGeom prst="rect">
             <a:avLst/>
@@ -7377,10 +7783,10 @@
       </p:sp>
       <p:pic>
         <p:nvPicPr>
-          <p:cNvPr id="3" name="Imagen 2">
+          <p:cNvPr id="4" name="Imagen 3">
             <a:extLst>
               <a:ext uri="{FF2B5EF4-FFF2-40B4-BE49-F238E27FC236}">
-                <a16:creationId xmlns:a16="http://schemas.microsoft.com/office/drawing/2014/main" id="{38A616AF-4897-314A-E831-79F8E33EF949}"/>
+                <a16:creationId xmlns:a16="http://schemas.microsoft.com/office/drawing/2014/main" id="{F751E9B4-5E31-C281-172E-B38F6ED644A0}"/>
               </a:ext>
             </a:extLst>
           </p:cNvPr>
@@ -7397,8 +7803,8 @@
         </p:blipFill>
         <p:spPr>
           <a:xfrm>
-            <a:off x="0" y="1412931"/>
-            <a:ext cx="9144000" cy="2460513"/>
+            <a:off x="0" y="1411405"/>
+            <a:ext cx="9144000" cy="2463565"/>
           </a:xfrm>
           <a:prstGeom prst="rect">
             <a:avLst/>
@@ -7491,10 +7897,10 @@
       </p:sp>
       <p:pic>
         <p:nvPicPr>
-          <p:cNvPr id="3" name="Imagen 2">
+          <p:cNvPr id="2" name="Imagen 1">
             <a:extLst>
               <a:ext uri="{FF2B5EF4-FFF2-40B4-BE49-F238E27FC236}">
-                <a16:creationId xmlns:a16="http://schemas.microsoft.com/office/drawing/2014/main" id="{45D79C62-12BE-31ED-97B8-EDCACFB07645}"/>
+                <a16:creationId xmlns:a16="http://schemas.microsoft.com/office/drawing/2014/main" id="{B8FFCEEC-A0F4-4F8D-454D-AAACC028BB62}"/>
               </a:ext>
             </a:extLst>
           </p:cNvPr>
@@ -7601,10 +8007,10 @@
       </p:sp>
       <p:pic>
         <p:nvPicPr>
-          <p:cNvPr id="4" name="Imagen 3">
+          <p:cNvPr id="3" name="Imagen 2">
             <a:extLst>
               <a:ext uri="{FF2B5EF4-FFF2-40B4-BE49-F238E27FC236}">
-                <a16:creationId xmlns:a16="http://schemas.microsoft.com/office/drawing/2014/main" id="{A4D91600-14B7-F11B-87BF-E91B21084A82}"/>
+                <a16:creationId xmlns:a16="http://schemas.microsoft.com/office/drawing/2014/main" id="{0206082F-D4C6-8856-C9C6-356214DB62C3}"/>
               </a:ext>
             </a:extLst>
           </p:cNvPr>
@@ -7621,8 +8027,8 @@
         </p:blipFill>
         <p:spPr>
           <a:xfrm>
-            <a:off x="599520" y="737922"/>
-            <a:ext cx="7944959" cy="3810532"/>
+            <a:off x="1752206" y="1171370"/>
+            <a:ext cx="5639587" cy="2943636"/>
           </a:xfrm>
           <a:prstGeom prst="rect">
             <a:avLst/>
@@ -7715,10 +8121,10 @@
       </p:sp>
       <p:pic>
         <p:nvPicPr>
-          <p:cNvPr id="3" name="Imagen 2">
+          <p:cNvPr id="4" name="Imagen 3">
             <a:extLst>
               <a:ext uri="{FF2B5EF4-FFF2-40B4-BE49-F238E27FC236}">
-                <a16:creationId xmlns:a16="http://schemas.microsoft.com/office/drawing/2014/main" id="{6E0B8D74-BF56-E2D8-5663-37365A3CA5AD}"/>
+                <a16:creationId xmlns:a16="http://schemas.microsoft.com/office/drawing/2014/main" id="{C0A064CB-E987-53FA-6BD8-FC4F785F4DB7}"/>
               </a:ext>
             </a:extLst>
           </p:cNvPr>
@@ -7735,8 +8141,8 @@
         </p:blipFill>
         <p:spPr>
           <a:xfrm>
-            <a:off x="0" y="952140"/>
-            <a:ext cx="9144000" cy="3382095"/>
+            <a:off x="0" y="985128"/>
+            <a:ext cx="9144000" cy="3316119"/>
           </a:xfrm>
           <a:prstGeom prst="rect">
             <a:avLst/>
@@ -7829,10 +8235,10 @@
       </p:sp>
       <p:pic>
         <p:nvPicPr>
-          <p:cNvPr id="2" name="Imagen 1">
+          <p:cNvPr id="3" name="Imagen 2">
             <a:extLst>
               <a:ext uri="{FF2B5EF4-FFF2-40B4-BE49-F238E27FC236}">
-                <a16:creationId xmlns:a16="http://schemas.microsoft.com/office/drawing/2014/main" id="{C01CA5E1-CC9C-38CF-F307-BB48A2AFBF51}"/>
+                <a16:creationId xmlns:a16="http://schemas.microsoft.com/office/drawing/2014/main" id="{81B8A7F3-D951-8B38-314B-07596C3AC536}"/>
               </a:ext>
             </a:extLst>
           </p:cNvPr>
@@ -7849,7 +8255,7 @@
         </p:blipFill>
         <p:spPr>
           <a:xfrm>
-            <a:off x="1106488" y="914940"/>
+            <a:off x="1143000" y="914940"/>
             <a:ext cx="6858000" cy="3456495"/>
           </a:xfrm>
           <a:prstGeom prst="rect">
@@ -7943,10 +8349,10 @@
       </p:sp>
       <p:pic>
         <p:nvPicPr>
-          <p:cNvPr id="2" name="Imagen 1">
+          <p:cNvPr id="3" name="Imagen 2">
             <a:extLst>
               <a:ext uri="{FF2B5EF4-FFF2-40B4-BE49-F238E27FC236}">
-                <a16:creationId xmlns:a16="http://schemas.microsoft.com/office/drawing/2014/main" id="{DB757FE6-599D-008E-45DF-1D3796111E59}"/>
+                <a16:creationId xmlns:a16="http://schemas.microsoft.com/office/drawing/2014/main" id="{B68F6131-7608-3359-1CB4-C0F11377574F}"/>
               </a:ext>
             </a:extLst>
           </p:cNvPr>
@@ -8061,10 +8467,10 @@
       </p:sp>
       <p:pic>
         <p:nvPicPr>
-          <p:cNvPr id="4" name="Imagen 3">
+          <p:cNvPr id="9" name="Imagen 8">
             <a:extLst>
               <a:ext uri="{FF2B5EF4-FFF2-40B4-BE49-F238E27FC236}">
-                <a16:creationId xmlns:a16="http://schemas.microsoft.com/office/drawing/2014/main" id="{7DF33262-5375-6053-CF93-E0CDF102DBB4}"/>
+                <a16:creationId xmlns:a16="http://schemas.microsoft.com/office/drawing/2014/main" id="{9A573263-9E4D-6B5A-E330-5DD4E8886256}"/>
               </a:ext>
             </a:extLst>
           </p:cNvPr>
@@ -8081,8 +8487,8 @@
         </p:blipFill>
         <p:spPr>
           <a:xfrm>
-            <a:off x="753535" y="1042764"/>
-            <a:ext cx="7563906" cy="3200847"/>
+            <a:off x="585231" y="521758"/>
+            <a:ext cx="7973538" cy="2486372"/>
           </a:xfrm>
           <a:prstGeom prst="rect">
             <a:avLst/>

--- a/Reporte 250826.pptx
+++ b/Reporte 250826.pptx
@@ -6959,10 +6959,10 @@
       </p:sp>
       <p:pic>
         <p:nvPicPr>
-          <p:cNvPr id="5" name="Imagen 4">
+          <p:cNvPr id="4" name="Imagen 3">
             <a:extLst>
               <a:ext uri="{FF2B5EF4-FFF2-40B4-BE49-F238E27FC236}">
-                <a16:creationId xmlns:a16="http://schemas.microsoft.com/office/drawing/2014/main" id="{75EA327C-1BCD-121F-D6AB-5DC7A8B773CA}"/>
+                <a16:creationId xmlns:a16="http://schemas.microsoft.com/office/drawing/2014/main" id="{1A031D92-2011-E264-A471-CAD410959D8F}"/>
               </a:ext>
             </a:extLst>
           </p:cNvPr>
@@ -6979,8 +6979,8 @@
         </p:blipFill>
         <p:spPr>
           <a:xfrm>
-            <a:off x="0" y="887730"/>
-            <a:ext cx="9144000" cy="3368040"/>
+            <a:off x="0" y="944510"/>
+            <a:ext cx="9144000" cy="3397355"/>
           </a:xfrm>
           <a:prstGeom prst="rect">
             <a:avLst/>
@@ -7065,10 +7065,10 @@
       </p:sp>
       <p:pic>
         <p:nvPicPr>
-          <p:cNvPr id="4" name="Imagen 3">
+          <p:cNvPr id="3" name="Imagen 2">
             <a:extLst>
               <a:ext uri="{FF2B5EF4-FFF2-40B4-BE49-F238E27FC236}">
-                <a16:creationId xmlns:a16="http://schemas.microsoft.com/office/drawing/2014/main" id="{7366FD91-37C7-55C3-220F-FC4025E74F53}"/>
+                <a16:creationId xmlns:a16="http://schemas.microsoft.com/office/drawing/2014/main" id="{7B06B157-8230-64EA-F852-D7C2A5860CE8}"/>
               </a:ext>
             </a:extLst>
           </p:cNvPr>
@@ -7085,8 +7085,8 @@
         </p:blipFill>
         <p:spPr>
           <a:xfrm>
-            <a:off x="0" y="1296988"/>
-            <a:ext cx="9144000" cy="2692400"/>
+            <a:off x="0" y="1327121"/>
+            <a:ext cx="9144000" cy="2632133"/>
           </a:xfrm>
           <a:prstGeom prst="rect">
             <a:avLst/>
@@ -7171,10 +7171,10 @@
       </p:sp>
       <p:pic>
         <p:nvPicPr>
-          <p:cNvPr id="4" name="Imagen 3">
+          <p:cNvPr id="5" name="Imagen 4">
             <a:extLst>
               <a:ext uri="{FF2B5EF4-FFF2-40B4-BE49-F238E27FC236}">
-                <a16:creationId xmlns:a16="http://schemas.microsoft.com/office/drawing/2014/main" id="{39DD9CCA-9BBE-B4EA-029E-A2472A421B7B}"/>
+                <a16:creationId xmlns:a16="http://schemas.microsoft.com/office/drawing/2014/main" id="{96D1BFD4-FAF1-34EF-F14D-80B1EC00F8A2}"/>
               </a:ext>
             </a:extLst>
           </p:cNvPr>
@@ -7191,8 +7191,8 @@
         </p:blipFill>
         <p:spPr>
           <a:xfrm>
-            <a:off x="0" y="1056984"/>
-            <a:ext cx="9144000" cy="3172408"/>
+            <a:off x="0" y="698082"/>
+            <a:ext cx="9144000" cy="3890211"/>
           </a:xfrm>
           <a:prstGeom prst="rect">
             <a:avLst/>
@@ -7277,10 +7277,10 @@
       </p:sp>
       <p:pic>
         <p:nvPicPr>
-          <p:cNvPr id="4" name="Imagen 3">
+          <p:cNvPr id="3" name="Imagen 2">
             <a:extLst>
               <a:ext uri="{FF2B5EF4-FFF2-40B4-BE49-F238E27FC236}">
-                <a16:creationId xmlns:a16="http://schemas.microsoft.com/office/drawing/2014/main" id="{EE031829-7D83-2FA3-275A-D1F3330EE3E0}"/>
+                <a16:creationId xmlns:a16="http://schemas.microsoft.com/office/drawing/2014/main" id="{F567C1CC-EF3F-AAA4-D733-D71CB3BF13D4}"/>
               </a:ext>
             </a:extLst>
           </p:cNvPr>
@@ -7297,8 +7297,8 @@
         </p:blipFill>
         <p:spPr>
           <a:xfrm>
-            <a:off x="0" y="1236028"/>
-            <a:ext cx="9144000" cy="2814320"/>
+            <a:off x="0" y="1251048"/>
+            <a:ext cx="9144000" cy="2784280"/>
           </a:xfrm>
           <a:prstGeom prst="rect">
             <a:avLst/>
@@ -7383,10 +7383,10 @@
       </p:sp>
       <p:pic>
         <p:nvPicPr>
-          <p:cNvPr id="4" name="Imagen 3">
+          <p:cNvPr id="3" name="Imagen 2">
             <a:extLst>
               <a:ext uri="{FF2B5EF4-FFF2-40B4-BE49-F238E27FC236}">
-                <a16:creationId xmlns:a16="http://schemas.microsoft.com/office/drawing/2014/main" id="{19115144-266E-E368-2513-75F21D9BB188}"/>
+                <a16:creationId xmlns:a16="http://schemas.microsoft.com/office/drawing/2014/main" id="{586F5479-7467-5803-4022-144D60B0A4A4}"/>
               </a:ext>
             </a:extLst>
           </p:cNvPr>
@@ -7403,8 +7403,8 @@
         </p:blipFill>
         <p:spPr>
           <a:xfrm>
-            <a:off x="0" y="696793"/>
-            <a:ext cx="9144000" cy="3892789"/>
+            <a:off x="0" y="1592966"/>
+            <a:ext cx="9144000" cy="2100444"/>
           </a:xfrm>
           <a:prstGeom prst="rect">
             <a:avLst/>
@@ -7495,10 +7495,10 @@
       </p:sp>
       <p:pic>
         <p:nvPicPr>
-          <p:cNvPr id="3" name="Imagen 2">
+          <p:cNvPr id="4" name="Imagen 3">
             <a:extLst>
               <a:ext uri="{FF2B5EF4-FFF2-40B4-BE49-F238E27FC236}">
-                <a16:creationId xmlns:a16="http://schemas.microsoft.com/office/drawing/2014/main" id="{CEC554CF-2C26-3B0B-2D0C-75F06B9794E8}"/>
+                <a16:creationId xmlns:a16="http://schemas.microsoft.com/office/drawing/2014/main" id="{5288315B-74C6-3057-B733-E7DE1A6CDB13}"/>
               </a:ext>
             </a:extLst>
           </p:cNvPr>
@@ -7515,8 +7515,8 @@
         </p:blipFill>
         <p:spPr>
           <a:xfrm>
-            <a:off x="0" y="1135774"/>
-            <a:ext cx="9144000" cy="3014827"/>
+            <a:off x="1969339" y="395912"/>
+            <a:ext cx="5132298" cy="4619717"/>
           </a:xfrm>
           <a:prstGeom prst="rect">
             <a:avLst/>
